--- a/Part3_Alignment/Part3_Alignment.pptx
+++ b/Part3_Alignment/Part3_Alignment.pptx
@@ -212,7 +212,7 @@
           <a:p>
             <a:fld id="{B5EDAD82-4A91-4FCD-8377-229631DED7F6}" type="datetimeFigureOut">
               <a:rPr lang="en-US" smtClean="0"/>
-              <a:t>7/20/2026</a:t>
+              <a:t>7/21/2026</a:t>
             </a:fld>
             <a:endParaRPr lang="en-US"/>
           </a:p>
@@ -544,6 +544,90 @@
           <a:p>
             <a:fld id="{11BBE17A-011E-42C8-B886-9AAF15091A83}" type="slidenum">
               <a:rPr lang="en-US" smtClean="0"/>
+              <a:t>3</a:t>
+            </a:fld>
+            <a:endParaRPr lang="en-US"/>
+          </a:p>
+        </p:txBody>
+      </p:sp>
+    </p:spTree>
+    <p:extLst>
+      <p:ext uri="{BB962C8B-B14F-4D97-AF65-F5344CB8AC3E}">
+        <p14:creationId xmlns:p14="http://schemas.microsoft.com/office/powerpoint/2010/main" val="1759448268"/>
+      </p:ext>
+    </p:extLst>
+  </p:cSld>
+  <p:clrMapOvr>
+    <a:masterClrMapping/>
+  </p:clrMapOvr>
+</p:notes>
+</file>
+
+<file path=ppt/notesSlides/notesSlide2.xml><?xml version="1.0" encoding="utf-8"?>
+<p:notes xmlns:a="http://schemas.openxmlformats.org/drawingml/2006/main" xmlns:r="http://schemas.openxmlformats.org/officeDocument/2006/relationships" xmlns:p="http://schemas.openxmlformats.org/presentationml/2006/main">
+  <p:cSld>
+    <p:spTree>
+      <p:nvGrpSpPr>
+        <p:cNvPr id="1" name=""/>
+        <p:cNvGrpSpPr/>
+        <p:nvPr/>
+      </p:nvGrpSpPr>
+      <p:grpSpPr>
+        <a:xfrm>
+          <a:off x="0" y="0"/>
+          <a:ext cx="0" cy="0"/>
+          <a:chOff x="0" y="0"/>
+          <a:chExt cx="0" cy="0"/>
+        </a:xfrm>
+      </p:grpSpPr>
+      <p:sp>
+        <p:nvSpPr>
+          <p:cNvPr id="2" name="Slide Image Placeholder 1"/>
+          <p:cNvSpPr>
+            <a:spLocks noGrp="1" noRot="1" noChangeAspect="1"/>
+          </p:cNvSpPr>
+          <p:nvPr>
+            <p:ph type="sldImg"/>
+          </p:nvPr>
+        </p:nvSpPr>
+        <p:spPr/>
+      </p:sp>
+      <p:sp>
+        <p:nvSpPr>
+          <p:cNvPr id="3" name="Notes Placeholder 2"/>
+          <p:cNvSpPr>
+            <a:spLocks noGrp="1"/>
+          </p:cNvSpPr>
+          <p:nvPr>
+            <p:ph type="body" idx="1"/>
+          </p:nvPr>
+        </p:nvSpPr>
+        <p:spPr/>
+        <p:txBody>
+          <a:bodyPr/>
+          <a:lstStyle/>
+          <a:p>
+            <a:endParaRPr lang="en-US" dirty="0"/>
+          </a:p>
+        </p:txBody>
+      </p:sp>
+      <p:sp>
+        <p:nvSpPr>
+          <p:cNvPr id="4" name="Slide Number Placeholder 3"/>
+          <p:cNvSpPr>
+            <a:spLocks noGrp="1"/>
+          </p:cNvSpPr>
+          <p:nvPr>
+            <p:ph type="sldNum" sz="quarter" idx="5"/>
+          </p:nvPr>
+        </p:nvSpPr>
+        <p:spPr/>
+        <p:txBody>
+          <a:bodyPr/>
+          <a:lstStyle/>
+          <a:p>
+            <a:fld id="{11BBE17A-011E-42C8-B886-9AAF15091A83}" type="slidenum">
+              <a:rPr lang="en-US" smtClean="0"/>
               <a:t>5</a:t>
             </a:fld>
             <a:endParaRPr lang="en-US"/>
@@ -710,7 +794,7 @@
           <a:p>
             <a:fld id="{5F8D886E-E654-4DF1-A3A6-2277A53517B0}" type="datetimeFigureOut">
               <a:rPr lang="en-US" smtClean="0"/>
-              <a:t>7/20/2026</a:t>
+              <a:t>7/21/2026</a:t>
             </a:fld>
             <a:endParaRPr lang="en-US"/>
           </a:p>
@@ -908,7 +992,7 @@
           <a:p>
             <a:fld id="{5F8D886E-E654-4DF1-A3A6-2277A53517B0}" type="datetimeFigureOut">
               <a:rPr lang="en-US" smtClean="0"/>
-              <a:t>7/20/2026</a:t>
+              <a:t>7/21/2026</a:t>
             </a:fld>
             <a:endParaRPr lang="en-US"/>
           </a:p>
@@ -1116,7 +1200,7 @@
           <a:p>
             <a:fld id="{5F8D886E-E654-4DF1-A3A6-2277A53517B0}" type="datetimeFigureOut">
               <a:rPr lang="en-US" smtClean="0"/>
-              <a:t>7/20/2026</a:t>
+              <a:t>7/21/2026</a:t>
             </a:fld>
             <a:endParaRPr lang="en-US"/>
           </a:p>
@@ -1314,7 +1398,7 @@
           <a:p>
             <a:fld id="{5F8D886E-E654-4DF1-A3A6-2277A53517B0}" type="datetimeFigureOut">
               <a:rPr lang="en-US" smtClean="0"/>
-              <a:t>7/20/2026</a:t>
+              <a:t>7/21/2026</a:t>
             </a:fld>
             <a:endParaRPr lang="en-US"/>
           </a:p>
@@ -1589,7 +1673,7 @@
           <a:p>
             <a:fld id="{5F8D886E-E654-4DF1-A3A6-2277A53517B0}" type="datetimeFigureOut">
               <a:rPr lang="en-US" smtClean="0"/>
-              <a:t>7/20/2026</a:t>
+              <a:t>7/21/2026</a:t>
             </a:fld>
             <a:endParaRPr lang="en-US"/>
           </a:p>
@@ -1854,7 +1938,7 @@
           <a:p>
             <a:fld id="{5F8D886E-E654-4DF1-A3A6-2277A53517B0}" type="datetimeFigureOut">
               <a:rPr lang="en-US" smtClean="0"/>
-              <a:t>7/20/2026</a:t>
+              <a:t>7/21/2026</a:t>
             </a:fld>
             <a:endParaRPr lang="en-US"/>
           </a:p>
@@ -2266,7 +2350,7 @@
           <a:p>
             <a:fld id="{5F8D886E-E654-4DF1-A3A6-2277A53517B0}" type="datetimeFigureOut">
               <a:rPr lang="en-US" smtClean="0"/>
-              <a:t>7/20/2026</a:t>
+              <a:t>7/21/2026</a:t>
             </a:fld>
             <a:endParaRPr lang="en-US"/>
           </a:p>
@@ -2407,7 +2491,7 @@
           <a:p>
             <a:fld id="{5F8D886E-E654-4DF1-A3A6-2277A53517B0}" type="datetimeFigureOut">
               <a:rPr lang="en-US" smtClean="0"/>
-              <a:t>7/20/2026</a:t>
+              <a:t>7/21/2026</a:t>
             </a:fld>
             <a:endParaRPr lang="en-US"/>
           </a:p>
@@ -2520,7 +2604,7 @@
           <a:p>
             <a:fld id="{5F8D886E-E654-4DF1-A3A6-2277A53517B0}" type="datetimeFigureOut">
               <a:rPr lang="en-US" smtClean="0"/>
-              <a:t>7/20/2026</a:t>
+              <a:t>7/21/2026</a:t>
             </a:fld>
             <a:endParaRPr lang="en-US"/>
           </a:p>
@@ -2831,7 +2915,7 @@
           <a:p>
             <a:fld id="{5F8D886E-E654-4DF1-A3A6-2277A53517B0}" type="datetimeFigureOut">
               <a:rPr lang="en-US" smtClean="0"/>
-              <a:t>7/20/2026</a:t>
+              <a:t>7/21/2026</a:t>
             </a:fld>
             <a:endParaRPr lang="en-US"/>
           </a:p>
@@ -3119,7 +3203,7 @@
           <a:p>
             <a:fld id="{5F8D886E-E654-4DF1-A3A6-2277A53517B0}" type="datetimeFigureOut">
               <a:rPr lang="en-US" smtClean="0"/>
-              <a:t>7/20/2026</a:t>
+              <a:t>7/21/2026</a:t>
             </a:fld>
             <a:endParaRPr lang="en-US"/>
           </a:p>
@@ -3360,7 +3444,7 @@
           <a:p>
             <a:fld id="{5F8D886E-E654-4DF1-A3A6-2277A53517B0}" type="datetimeFigureOut">
               <a:rPr lang="en-US" smtClean="0"/>
-              <a:t>7/20/2026</a:t>
+              <a:t>7/21/2026</a:t>
             </a:fld>
             <a:endParaRPr lang="en-US"/>
           </a:p>
@@ -6743,7 +6827,7 @@
           <p:nvPr/>
         </p:nvPicPr>
         <p:blipFill>
-          <a:blip r:embed="rId2"/>
+          <a:blip r:embed="rId3"/>
           <a:stretch>
             <a:fillRect/>
           </a:stretch>
@@ -9190,7 +9274,7 @@
         <p:spPr>
           <a:xfrm>
             <a:off x="5287351" y="1825625"/>
-            <a:ext cx="6622709" cy="4898560"/>
+            <a:ext cx="6779526" cy="4898560"/>
           </a:xfrm>
         </p:spPr>
         <p:txBody>
@@ -9276,7 +9360,7 @@
                 </a:solidFill>
                 <a:latin typeface="Abadi" panose="020B0604020104020204" pitchFamily="34" charset="0"/>
               </a:rPr>
-              <a:t>bwa mem -t 2 - </a:t>
+              <a:t>bwa mem -t 2 -M </a:t>
             </a:r>
             <a:r>
               <a:rPr lang="en-US" b="1" dirty="0" err="1">
@@ -9799,7 +9883,7 @@
         </p:nvSpPr>
         <p:spPr>
           <a:xfrm>
-            <a:off x="11405281" y="2694322"/>
+            <a:off x="11572546" y="2694322"/>
             <a:ext cx="434897" cy="591015"/>
           </a:xfrm>
           <a:prstGeom prst="ellipse">
@@ -9905,8 +9989,8 @@
         </p:nvSpPr>
         <p:spPr>
           <a:xfrm>
-            <a:off x="11786653" y="1424986"/>
-            <a:ext cx="280224" cy="1447707"/>
+            <a:off x="11851237" y="1424987"/>
+            <a:ext cx="215639" cy="1325564"/>
           </a:xfrm>
           <a:custGeom>
             <a:avLst/>
